--- a/Final Project - Jeremy Johnson.pptx
+++ b/Final Project - Jeremy Johnson.pptx
@@ -12141,6 +12141,68 @@
               <a:sym typeface="Calibri"/>
             </a:endParaRPr>
           </a:p>
+          <a:p>
+            <a:pPr marL="457200" lvl="0" indent="-495300" algn="just" rtl="0">
+              <a:spcBef>
+                <a:spcPts val="0"/>
+              </a:spcBef>
+              <a:spcAft>
+                <a:spcPts val="0"/>
+              </a:spcAft>
+              <a:buClr>
+                <a:schemeClr val="dk1"/>
+              </a:buClr>
+              <a:buSzPts val="4200"/>
+              <a:buFont typeface="Calibri"/>
+              <a:buChar char="●"/>
+            </a:pPr>
+            <a:r>
+              <a:rPr lang="en-US" sz="4200" dirty="0">
+                <a:solidFill>
+                  <a:schemeClr val="dk1"/>
+                </a:solidFill>
+                <a:latin typeface="Calibri"/>
+                <a:ea typeface="Calibri"/>
+                <a:cs typeface="Calibri"/>
+                <a:sym typeface="Calibri"/>
+              </a:rPr>
+              <a:t>All files </a:t>
+            </a:r>
+            <a:r>
+              <a:rPr lang="en-US" sz="4200">
+                <a:solidFill>
+                  <a:schemeClr val="dk1"/>
+                </a:solidFill>
+                <a:latin typeface="Calibri"/>
+                <a:ea typeface="Calibri"/>
+                <a:cs typeface="Calibri"/>
+                <a:sym typeface="Calibri"/>
+              </a:rPr>
+              <a:t>are saved on </a:t>
+            </a:r>
+            <a:r>
+              <a:rPr lang="en-US" sz="4200">
+                <a:solidFill>
+                  <a:schemeClr val="dk1"/>
+                </a:solidFill>
+                <a:latin typeface="Calibri"/>
+                <a:ea typeface="Calibri"/>
+                <a:cs typeface="Calibri"/>
+                <a:sym typeface="Calibri"/>
+                <a:hlinkClick r:id="rId6"/>
+              </a:rPr>
+              <a:t>GitHub</a:t>
+            </a:r>
+            <a:endParaRPr lang="en-US" sz="4200" dirty="0">
+              <a:solidFill>
+                <a:schemeClr val="dk1"/>
+              </a:solidFill>
+              <a:latin typeface="Calibri"/>
+              <a:ea typeface="Calibri"/>
+              <a:cs typeface="Calibri"/>
+              <a:sym typeface="Calibri"/>
+            </a:endParaRPr>
+          </a:p>
         </p:txBody>
       </p:sp>
       <p:sp>
@@ -12202,7 +12264,7 @@
         <p:spPr>
           <a:xfrm>
             <a:off x="13362881" y="17969043"/>
-            <a:ext cx="11121300" cy="11323251"/>
+            <a:ext cx="11121300" cy="9756043"/>
           </a:xfrm>
           <a:prstGeom prst="rect">
             <a:avLst/>
@@ -12353,6 +12415,43 @@
               <a:buFont typeface="Arial"/>
               <a:buNone/>
             </a:pPr>
+            <a:r>
+              <a:rPr lang="en-US" sz="4200" dirty="0">
+                <a:solidFill>
+                  <a:schemeClr val="dk1"/>
+                </a:solidFill>
+                <a:latin typeface="Calibri"/>
+                <a:ea typeface="Calibri"/>
+                <a:cs typeface="Calibri"/>
+                <a:sym typeface="Calibri"/>
+              </a:rPr>
+              <a:t>This is a link to the </a:t>
+            </a:r>
+            <a:r>
+              <a:rPr lang="en-US" sz="4200" dirty="0">
+                <a:solidFill>
+                  <a:schemeClr val="dk1"/>
+                </a:solidFill>
+                <a:latin typeface="Calibri"/>
+                <a:ea typeface="Calibri"/>
+                <a:cs typeface="Calibri"/>
+                <a:sym typeface="Calibri"/>
+                <a:hlinkClick r:id="rId7"/>
+              </a:rPr>
+              <a:t>20 Best Whitewater Towns in the Continental US Withing 20 Miles of a Brew Pub</a:t>
+            </a:r>
+            <a:r>
+              <a:rPr lang="en-US" sz="4200" dirty="0">
+                <a:solidFill>
+                  <a:schemeClr val="dk1"/>
+                </a:solidFill>
+                <a:latin typeface="Calibri"/>
+                <a:ea typeface="Calibri"/>
+                <a:cs typeface="Calibri"/>
+                <a:sym typeface="Calibri"/>
+              </a:rPr>
+              <a:t>.</a:t>
+            </a:r>
             <a:endParaRPr sz="4200" dirty="0">
               <a:solidFill>
                 <a:schemeClr val="dk1"/>
@@ -13297,7 +13396,7 @@
           <p:nvPr/>
         </p:nvPicPr>
         <p:blipFill>
-          <a:blip r:embed="rId7"/>
+          <a:blip r:embed="rId8"/>
           <a:stretch>
             <a:fillRect/>
           </a:stretch>
